--- a/presentation/emc-bo-block.pptx
+++ b/presentation/emc-bo-block.pptx
@@ -2633,14 +2633,14 @@
             <a:pPr algn="ctr"/>
             <a:r>
               <a:rPr lang="en-CA" sz="2000" dirty="0"/>
-              <a:t>Sterling Baird, Ph.D.</a:t>
+              <a:t>Marcus Madsen</a:t>
             </a:r>
             <a:br>
               <a:rPr lang="en-CA" sz="2000" dirty="0"/>
             </a:br>
             <a:r>
               <a:rPr lang="en-CA" sz="2000" dirty="0"/>
-              <a:t>Assistant Professor, Mech Eng</a:t>
+              <a:t>Research Assistant</a:t>
             </a:r>
           </a:p>
           <a:p>
@@ -2663,7 +2663,7 @@
             <a:pPr algn="ctr"/>
             <a:r>
               <a:rPr lang="en-CA" sz="2000" dirty="0"/>
-              <a:t>EMC</a:t>
+              <a:t>ASME IDETC-CIE 2026</a:t>
             </a:r>
             <a:br>
               <a:rPr lang="en-CA" sz="2000" dirty="0"/>
@@ -2676,7 +2676,7 @@
                   </a:schemeClr>
                 </a:solidFill>
               </a:rPr>
-              <a:t>June 2026</a:t>
+              <a:t>August 2026</a:t>
             </a:r>
           </a:p>
         </p:txBody>
@@ -6143,14 +6143,14 @@
             <a:pPr algn="l"/>
             <a:r>
               <a:rPr lang="en-CA" b="0" dirty="0"/>
-              <a:t>	Let’s discover high-performing alloys</a:t>
+              <a:t>	Let’s build better tensegrity structures</a:t>
             </a:r>
             <a:br>
               <a:rPr lang="en-CA" b="0" dirty="0"/>
             </a:br>
             <a:r>
               <a:rPr lang="en-CA" b="0" dirty="0"/>
-              <a:t>	10x faster with AI at a tenth of the cost</a:t>
+              <a:t>	faster, using real drop-test data</a:t>
             </a:r>
             <a:br>
               <a:rPr lang="en-CA" b="0" dirty="0"/>
@@ -6167,7 +6167,7 @@
                   </a:schemeClr>
                 </a:solidFill>
               </a:rPr>
-              <a:t>+ vertical cloud labs and frugal twins</a:t>
+              <a:t>+ closed-loop BO and multi-material printing</a:t>
             </a:r>
           </a:p>
         </p:txBody>
